--- a/deliverables/Mandvi_DevOps_Session_Presentation.pptx
+++ b/deliverables/Mandvi_DevOps_Session_Presentation.pptx
@@ -3184,7 +3184,7 @@
                 <a:ea typeface="Calibri" pitchFamily="34" charset="-122"/>
                 <a:cs typeface="Calibri" pitchFamily="34" charset="-120"/>
               </a:rPr>
-              <a:t>Resource Person: Dhruv Hemanthbhai Patel  |  DevOps Engineer at Raapid Inc.</a:t>
+              <a:t>Resource Person: Dhruv Hemantbhai Patel  |  DevOps Engineer at Raapid Inc.</a:t>
             </a:r>
             <a:endParaRPr lang="en-US" sz="1500" dirty="0"/>
           </a:p>
